--- a/Jesus Paid It All_chords.pptx
+++ b/Jesus Paid It All_chords.pptx
@@ -9,9 +9,9 @@
     <p:sldId id="284" r:id="rId3"/>
     <p:sldId id="276" r:id="rId4"/>
     <p:sldId id="285" r:id="rId5"/>
-    <p:sldId id="286" r:id="rId6"/>
+    <p:sldId id="290" r:id="rId6"/>
     <p:sldId id="287" r:id="rId7"/>
-    <p:sldId id="288" r:id="rId8"/>
+    <p:sldId id="291" r:id="rId8"/>
     <p:sldId id="289" r:id="rId9"/>
   </p:sldIdLst>
   <p:sldSz cx="12192000" cy="6858000"/>
@@ -266,7 +266,7 @@
           <a:p>
             <a:fld id="{E759A0DE-F190-5444-87AC-4719D5F20D15}" type="datetimeFigureOut">
               <a:rPr lang="en-US" smtClean="0"/>
-              <a:t>3/31/26</a:t>
+              <a:t>4/3/26</a:t>
             </a:fld>
             <a:endParaRPr lang="en-US"/>
           </a:p>
@@ -464,7 +464,7 @@
           <a:p>
             <a:fld id="{E759A0DE-F190-5444-87AC-4719D5F20D15}" type="datetimeFigureOut">
               <a:rPr lang="en-US" smtClean="0"/>
-              <a:t>3/31/26</a:t>
+              <a:t>4/3/26</a:t>
             </a:fld>
             <a:endParaRPr lang="en-US"/>
           </a:p>
@@ -672,7 +672,7 @@
           <a:p>
             <a:fld id="{E759A0DE-F190-5444-87AC-4719D5F20D15}" type="datetimeFigureOut">
               <a:rPr lang="en-US" smtClean="0"/>
-              <a:t>3/31/26</a:t>
+              <a:t>4/3/26</a:t>
             </a:fld>
             <a:endParaRPr lang="en-US"/>
           </a:p>
@@ -870,7 +870,7 @@
           <a:p>
             <a:fld id="{E759A0DE-F190-5444-87AC-4719D5F20D15}" type="datetimeFigureOut">
               <a:rPr lang="en-US" smtClean="0"/>
-              <a:t>3/31/26</a:t>
+              <a:t>4/3/26</a:t>
             </a:fld>
             <a:endParaRPr lang="en-US"/>
           </a:p>
@@ -1145,7 +1145,7 @@
           <a:p>
             <a:fld id="{E759A0DE-F190-5444-87AC-4719D5F20D15}" type="datetimeFigureOut">
               <a:rPr lang="en-US" smtClean="0"/>
-              <a:t>3/31/26</a:t>
+              <a:t>4/3/26</a:t>
             </a:fld>
             <a:endParaRPr lang="en-US"/>
           </a:p>
@@ -1410,7 +1410,7 @@
           <a:p>
             <a:fld id="{E759A0DE-F190-5444-87AC-4719D5F20D15}" type="datetimeFigureOut">
               <a:rPr lang="en-US" smtClean="0"/>
-              <a:t>3/31/26</a:t>
+              <a:t>4/3/26</a:t>
             </a:fld>
             <a:endParaRPr lang="en-US"/>
           </a:p>
@@ -1822,7 +1822,7 @@
           <a:p>
             <a:fld id="{E759A0DE-F190-5444-87AC-4719D5F20D15}" type="datetimeFigureOut">
               <a:rPr lang="en-US" smtClean="0"/>
-              <a:t>3/31/26</a:t>
+              <a:t>4/3/26</a:t>
             </a:fld>
             <a:endParaRPr lang="en-US"/>
           </a:p>
@@ -1963,7 +1963,7 @@
           <a:p>
             <a:fld id="{E759A0DE-F190-5444-87AC-4719D5F20D15}" type="datetimeFigureOut">
               <a:rPr lang="en-US" smtClean="0"/>
-              <a:t>3/31/26</a:t>
+              <a:t>4/3/26</a:t>
             </a:fld>
             <a:endParaRPr lang="en-US"/>
           </a:p>
@@ -2076,7 +2076,7 @@
           <a:p>
             <a:fld id="{E759A0DE-F190-5444-87AC-4719D5F20D15}" type="datetimeFigureOut">
               <a:rPr lang="en-US" smtClean="0"/>
-              <a:t>3/31/26</a:t>
+              <a:t>4/3/26</a:t>
             </a:fld>
             <a:endParaRPr lang="en-US"/>
           </a:p>
@@ -2387,7 +2387,7 @@
           <a:p>
             <a:fld id="{E759A0DE-F190-5444-87AC-4719D5F20D15}" type="datetimeFigureOut">
               <a:rPr lang="en-US" smtClean="0"/>
-              <a:t>3/31/26</a:t>
+              <a:t>4/3/26</a:t>
             </a:fld>
             <a:endParaRPr lang="en-US"/>
           </a:p>
@@ -2675,7 +2675,7 @@
           <a:p>
             <a:fld id="{E759A0DE-F190-5444-87AC-4719D5F20D15}" type="datetimeFigureOut">
               <a:rPr lang="en-US" smtClean="0"/>
-              <a:t>3/31/26</a:t>
+              <a:t>4/3/26</a:t>
             </a:fld>
             <a:endParaRPr lang="en-US"/>
           </a:p>
@@ -2916,7 +2916,7 @@
           <a:p>
             <a:fld id="{E759A0DE-F190-5444-87AC-4719D5F20D15}" type="datetimeFigureOut">
               <a:rPr lang="en-US" smtClean="0"/>
-              <a:t>3/31/26</a:t>
+              <a:t>4/3/26</a:t>
             </a:fld>
             <a:endParaRPr lang="en-US"/>
           </a:p>
@@ -3737,24 +3737,7 @@
           </a:bodyPr>
           <a:lstStyle/>
           <a:p>
-            <a:endParaRPr lang="en-US" sz="4400" dirty="0">
-              <a:solidFill>
-                <a:schemeClr val="bg1"/>
-              </a:solidFill>
-              <a:latin typeface="Avenir Medium" panose="02000503020000020003" pitchFamily="2" charset="0"/>
-              <a:ea typeface="Bodoni Ornaments" pitchFamily="2" charset="0"/>
-            </a:endParaRPr>
-          </a:p>
-          <a:p>
-            <a:endParaRPr lang="en-US" sz="4400" dirty="0">
-              <a:solidFill>
-                <a:schemeClr val="bg1"/>
-              </a:solidFill>
-              <a:latin typeface="Avenir Medium" panose="02000503020000020003" pitchFamily="2" charset="0"/>
-              <a:ea typeface="Bodoni Ornaments" pitchFamily="2" charset="0"/>
-            </a:endParaRPr>
-          </a:p>
-          <a:p>
+            <a:pPr algn="l"/>
             <a:r>
               <a:rPr lang="en-US" sz="4400" dirty="0">
                 <a:solidFill>
@@ -3763,10 +3746,47 @@
                 <a:latin typeface="Avenir Medium" panose="02000503020000020003" pitchFamily="2" charset="0"/>
                 <a:ea typeface="Bodoni Ornaments" pitchFamily="2" charset="0"/>
               </a:rPr>
+              <a:t>  </a:t>
+            </a:r>
+            <a:r>
+              <a:rPr lang="en-US" sz="3600" dirty="0">
+                <a:solidFill>
+                  <a:srgbClr val="FFFF00"/>
+                </a:solidFill>
+                <a:latin typeface="Avenir Medium" panose="02000503020000020003" pitchFamily="2" charset="0"/>
+                <a:ea typeface="Bodoni Ornaments" pitchFamily="2" charset="0"/>
+              </a:rPr>
+              <a:t>C</a:t>
+            </a:r>
+          </a:p>
+          <a:p>
+            <a:pPr algn="l"/>
+            <a:r>
+              <a:rPr lang="en-US" sz="4400" dirty="0">
+                <a:solidFill>
+                  <a:schemeClr val="bg1"/>
+                </a:solidFill>
+                <a:latin typeface="Avenir Medium" panose="02000503020000020003" pitchFamily="2" charset="0"/>
+                <a:ea typeface="Bodoni Ornaments" pitchFamily="2" charset="0"/>
+              </a:rPr>
               <a:t>I hear the Savior say,</a:t>
             </a:r>
           </a:p>
           <a:p>
+            <a:pPr algn="l"/>
+            <a:r>
+              <a:rPr lang="en-US" sz="3600" dirty="0">
+                <a:solidFill>
+                  <a:srgbClr val="FFFF00"/>
+                </a:solidFill>
+                <a:latin typeface="Avenir Medium" panose="02000503020000020003" pitchFamily="2" charset="0"/>
+                <a:ea typeface="Bodoni Ornaments" pitchFamily="2" charset="0"/>
+              </a:rPr>
+              <a:t>        G                                   C</a:t>
+            </a:r>
+          </a:p>
+          <a:p>
+            <a:pPr algn="l"/>
             <a:r>
               <a:rPr lang="en-US" sz="4400" dirty="0">
                 <a:solidFill>
@@ -3779,6 +3799,20 @@
             </a:r>
           </a:p>
           <a:p>
+            <a:pPr algn="l"/>
+            <a:r>
+              <a:rPr lang="en-US" sz="3600" dirty="0">
+                <a:solidFill>
+                  <a:srgbClr val="FFFF00"/>
+                </a:solidFill>
+                <a:latin typeface="Avenir Medium" panose="02000503020000020003" pitchFamily="2" charset="0"/>
+                <a:ea typeface="Bodoni Ornaments" pitchFamily="2" charset="0"/>
+              </a:rPr>
+              <a:t>                 Am                                     F</a:t>
+            </a:r>
+          </a:p>
+          <a:p>
+            <a:pPr algn="l"/>
             <a:r>
               <a:rPr lang="en-US" sz="4400" dirty="0">
                 <a:solidFill>
@@ -3791,6 +3825,20 @@
             </a:r>
           </a:p>
           <a:p>
+            <a:pPr algn="l"/>
+            <a:r>
+              <a:rPr lang="en-US" sz="3600" dirty="0">
+                <a:solidFill>
+                  <a:srgbClr val="FFFF00"/>
+                </a:solidFill>
+                <a:latin typeface="Avenir Medium" panose="02000503020000020003" pitchFamily="2" charset="0"/>
+                <a:ea typeface="Bodoni Ornaments" pitchFamily="2" charset="0"/>
+              </a:rPr>
+              <a:t>               C                 G        C</a:t>
+            </a:r>
+          </a:p>
+          <a:p>
+            <a:pPr algn="l"/>
             <a:r>
               <a:rPr lang="en-US" sz="4400" dirty="0">
                 <a:solidFill>
@@ -3878,24 +3926,20 @@
           </a:bodyPr>
           <a:lstStyle/>
           <a:p>
-            <a:endParaRPr lang="en-US" sz="4400" dirty="0">
-              <a:solidFill>
-                <a:schemeClr val="bg1"/>
-              </a:solidFill>
-              <a:latin typeface="Avenir Medium" panose="02000503020000020003" pitchFamily="2" charset="0"/>
-              <a:ea typeface="Bodoni Ornaments" pitchFamily="2" charset="0"/>
-            </a:endParaRPr>
-          </a:p>
-          <a:p>
-            <a:endParaRPr lang="en-US" sz="4400" dirty="0">
-              <a:solidFill>
-                <a:schemeClr val="bg1"/>
-              </a:solidFill>
-              <a:latin typeface="Avenir Medium" panose="02000503020000020003" pitchFamily="2" charset="0"/>
-              <a:ea typeface="Bodoni Ornaments" pitchFamily="2" charset="0"/>
-            </a:endParaRPr>
-          </a:p>
-          <a:p>
+            <a:pPr algn="l"/>
+            <a:r>
+              <a:rPr lang="en-US" sz="3600" dirty="0">
+                <a:solidFill>
+                  <a:srgbClr val="FFFF00"/>
+                </a:solidFill>
+                <a:latin typeface="Avenir Medium" panose="02000503020000020003" pitchFamily="2" charset="0"/>
+                <a:ea typeface="Bodoni Ornaments" pitchFamily="2" charset="0"/>
+              </a:rPr>
+              <a:t>C                        Am</a:t>
+            </a:r>
+          </a:p>
+          <a:p>
+            <a:pPr algn="l"/>
             <a:r>
               <a:rPr lang="en-US" sz="4400" dirty="0">
                 <a:solidFill>
@@ -3908,6 +3952,20 @@
             </a:r>
           </a:p>
           <a:p>
+            <a:pPr algn="l"/>
+            <a:r>
+              <a:rPr lang="en-US" sz="3600" dirty="0">
+                <a:solidFill>
+                  <a:srgbClr val="FFFF00"/>
+                </a:solidFill>
+                <a:latin typeface="Avenir Medium" panose="02000503020000020003" pitchFamily="2" charset="0"/>
+                <a:ea typeface="Bodoni Ornaments" pitchFamily="2" charset="0"/>
+              </a:rPr>
+              <a:t>C                     G</a:t>
+            </a:r>
+          </a:p>
+          <a:p>
+            <a:pPr algn="l"/>
             <a:r>
               <a:rPr lang="en-US" sz="4400" dirty="0">
                 <a:solidFill>
@@ -3920,6 +3978,20 @@
             </a:r>
           </a:p>
           <a:p>
+            <a:pPr algn="l"/>
+            <a:r>
+              <a:rPr lang="en-US" sz="3600" dirty="0">
+                <a:solidFill>
+                  <a:srgbClr val="FFFF00"/>
+                </a:solidFill>
+                <a:latin typeface="Avenir Medium" panose="02000503020000020003" pitchFamily="2" charset="0"/>
+                <a:ea typeface="Bodoni Ornaments" pitchFamily="2" charset="0"/>
+              </a:rPr>
+              <a:t>C                         F</a:t>
+            </a:r>
+          </a:p>
+          <a:p>
+            <a:pPr algn="l"/>
             <a:r>
               <a:rPr lang="en-US" sz="4400" dirty="0">
                 <a:solidFill>
@@ -3932,6 +4004,20 @@
             </a:r>
           </a:p>
           <a:p>
+            <a:pPr algn="l"/>
+            <a:r>
+              <a:rPr lang="en-US" sz="3600" dirty="0">
+                <a:solidFill>
+                  <a:srgbClr val="FFFF00"/>
+                </a:solidFill>
+                <a:latin typeface="Avenir Medium" panose="02000503020000020003" pitchFamily="2" charset="0"/>
+                <a:ea typeface="Bodoni Ornaments" pitchFamily="2" charset="0"/>
+              </a:rPr>
+              <a:t>       C                  G              C</a:t>
+            </a:r>
+          </a:p>
+          <a:p>
+            <a:pPr algn="l"/>
             <a:r>
               <a:rPr lang="en-US" sz="4400" dirty="0">
                 <a:solidFill>
@@ -4017,24 +4103,20 @@
           </a:bodyPr>
           <a:lstStyle/>
           <a:p>
-            <a:endParaRPr lang="en-US" sz="4400" dirty="0">
-              <a:solidFill>
-                <a:schemeClr val="bg1"/>
-              </a:solidFill>
-              <a:latin typeface="Avenir Medium" panose="02000503020000020003" pitchFamily="2" charset="0"/>
-              <a:ea typeface="Bodoni Ornaments" pitchFamily="2" charset="0"/>
-            </a:endParaRPr>
-          </a:p>
-          <a:p>
-            <a:endParaRPr lang="en-US" sz="4400" dirty="0">
-              <a:solidFill>
-                <a:schemeClr val="bg1"/>
-              </a:solidFill>
-              <a:latin typeface="Avenir Medium" panose="02000503020000020003" pitchFamily="2" charset="0"/>
-              <a:ea typeface="Bodoni Ornaments" pitchFamily="2" charset="0"/>
-            </a:endParaRPr>
-          </a:p>
-          <a:p>
+            <a:pPr algn="l"/>
+            <a:r>
+              <a:rPr lang="en-US" sz="3600" dirty="0">
+                <a:solidFill>
+                  <a:srgbClr val="FFFF00"/>
+                </a:solidFill>
+                <a:latin typeface="Avenir Medium" panose="02000503020000020003" pitchFamily="2" charset="0"/>
+                <a:ea typeface="Bodoni Ornaments" pitchFamily="2" charset="0"/>
+              </a:rPr>
+              <a:t>C</a:t>
+            </a:r>
+          </a:p>
+          <a:p>
+            <a:pPr algn="l"/>
             <a:r>
               <a:rPr lang="en-US" sz="4400" dirty="0">
                 <a:solidFill>
@@ -4047,6 +4129,20 @@
             </a:r>
           </a:p>
           <a:p>
+            <a:pPr algn="l"/>
+            <a:r>
+              <a:rPr lang="en-US" sz="3600" dirty="0">
+                <a:solidFill>
+                  <a:srgbClr val="FFFF00"/>
+                </a:solidFill>
+                <a:latin typeface="Avenir Medium" panose="02000503020000020003" pitchFamily="2" charset="0"/>
+                <a:ea typeface="Bodoni Ornaments" pitchFamily="2" charset="0"/>
+              </a:rPr>
+              <a:t>G                                       C</a:t>
+            </a:r>
+          </a:p>
+          <a:p>
+            <a:pPr algn="l"/>
             <a:r>
               <a:rPr lang="en-US" sz="4400" dirty="0">
                 <a:solidFill>
@@ -4079,6 +4175,20 @@
             </a:r>
           </a:p>
           <a:p>
+            <a:pPr algn="l"/>
+            <a:r>
+              <a:rPr lang="en-US" sz="3600" dirty="0">
+                <a:solidFill>
+                  <a:srgbClr val="FFFF00"/>
+                </a:solidFill>
+                <a:latin typeface="Avenir Medium" panose="02000503020000020003" pitchFamily="2" charset="0"/>
+                <a:ea typeface="Bodoni Ornaments" pitchFamily="2" charset="0"/>
+              </a:rPr>
+              <a:t>Am                                         F</a:t>
+            </a:r>
+          </a:p>
+          <a:p>
+            <a:pPr algn="l"/>
             <a:r>
               <a:rPr lang="en-US" sz="4400" dirty="0">
                 <a:solidFill>
@@ -4091,6 +4201,20 @@
             </a:r>
           </a:p>
           <a:p>
+            <a:pPr algn="l"/>
+            <a:r>
+              <a:rPr lang="en-US" sz="3600" dirty="0">
+                <a:solidFill>
+                  <a:srgbClr val="FFFF00"/>
+                </a:solidFill>
+                <a:latin typeface="Avenir Medium" panose="02000503020000020003" pitchFamily="2" charset="0"/>
+                <a:ea typeface="Bodoni Ornaments" pitchFamily="2" charset="0"/>
+              </a:rPr>
+              <a:t>         C               G               C</a:t>
+            </a:r>
+          </a:p>
+          <a:p>
+            <a:pPr algn="l"/>
             <a:r>
               <a:rPr lang="en-US" sz="4400" dirty="0">
                 <a:solidFill>
@@ -4135,7 +4259,7 @@
         <p:cNvPr id="1" name="">
           <a:extLst>
             <a:ext uri="{FF2B5EF4-FFF2-40B4-BE49-F238E27FC236}">
-              <a16:creationId xmlns:a16="http://schemas.microsoft.com/office/drawing/2014/main" id="{A99C6446-1466-75F1-3BE4-D7E5F0F82F8B}"/>
+              <a16:creationId xmlns:a16="http://schemas.microsoft.com/office/drawing/2014/main" id="{55FED0BD-7288-6664-B398-20315864A212}"/>
             </a:ext>
           </a:extLst>
         </p:cNvPr>
@@ -4155,7 +4279,7 @@
           <p:cNvPr id="3" name="Subtitle 2">
             <a:extLst>
               <a:ext uri="{FF2B5EF4-FFF2-40B4-BE49-F238E27FC236}">
-                <a16:creationId xmlns:a16="http://schemas.microsoft.com/office/drawing/2014/main" id="{276782DE-E625-460C-FA48-97D776294933}"/>
+                <a16:creationId xmlns:a16="http://schemas.microsoft.com/office/drawing/2014/main" id="{0ECDD8E7-01E1-7510-E28F-160CA71BEFC2}"/>
               </a:ext>
             </a:extLst>
           </p:cNvPr>
@@ -4178,24 +4302,20 @@
           </a:bodyPr>
           <a:lstStyle/>
           <a:p>
-            <a:endParaRPr lang="en-US" sz="4400" dirty="0">
-              <a:solidFill>
-                <a:schemeClr val="bg1"/>
-              </a:solidFill>
-              <a:latin typeface="Avenir Medium" panose="02000503020000020003" pitchFamily="2" charset="0"/>
-              <a:ea typeface="Bodoni Ornaments" pitchFamily="2" charset="0"/>
-            </a:endParaRPr>
-          </a:p>
-          <a:p>
-            <a:endParaRPr lang="en-US" sz="4400" dirty="0">
-              <a:solidFill>
-                <a:schemeClr val="bg1"/>
-              </a:solidFill>
-              <a:latin typeface="Avenir Medium" panose="02000503020000020003" pitchFamily="2" charset="0"/>
-              <a:ea typeface="Bodoni Ornaments" pitchFamily="2" charset="0"/>
-            </a:endParaRPr>
-          </a:p>
-          <a:p>
+            <a:pPr algn="l"/>
+            <a:r>
+              <a:rPr lang="en-US" sz="3600" dirty="0">
+                <a:solidFill>
+                  <a:srgbClr val="FFFF00"/>
+                </a:solidFill>
+                <a:latin typeface="Avenir Medium" panose="02000503020000020003" pitchFamily="2" charset="0"/>
+                <a:ea typeface="Bodoni Ornaments" pitchFamily="2" charset="0"/>
+              </a:rPr>
+              <a:t>C                        Am</a:t>
+            </a:r>
+          </a:p>
+          <a:p>
+            <a:pPr algn="l"/>
             <a:r>
               <a:rPr lang="en-US" sz="4400" dirty="0">
                 <a:solidFill>
@@ -4208,6 +4328,20 @@
             </a:r>
           </a:p>
           <a:p>
+            <a:pPr algn="l"/>
+            <a:r>
+              <a:rPr lang="en-US" sz="3600" dirty="0">
+                <a:solidFill>
+                  <a:srgbClr val="FFFF00"/>
+                </a:solidFill>
+                <a:latin typeface="Avenir Medium" panose="02000503020000020003" pitchFamily="2" charset="0"/>
+                <a:ea typeface="Bodoni Ornaments" pitchFamily="2" charset="0"/>
+              </a:rPr>
+              <a:t>C                     G</a:t>
+            </a:r>
+          </a:p>
+          <a:p>
+            <a:pPr algn="l"/>
             <a:r>
               <a:rPr lang="en-US" sz="4400" dirty="0">
                 <a:solidFill>
@@ -4220,6 +4354,20 @@
             </a:r>
           </a:p>
           <a:p>
+            <a:pPr algn="l"/>
+            <a:r>
+              <a:rPr lang="en-US" sz="3600" dirty="0">
+                <a:solidFill>
+                  <a:srgbClr val="FFFF00"/>
+                </a:solidFill>
+                <a:latin typeface="Avenir Medium" panose="02000503020000020003" pitchFamily="2" charset="0"/>
+                <a:ea typeface="Bodoni Ornaments" pitchFamily="2" charset="0"/>
+              </a:rPr>
+              <a:t>C                         F</a:t>
+            </a:r>
+          </a:p>
+          <a:p>
+            <a:pPr algn="l"/>
             <a:r>
               <a:rPr lang="en-US" sz="4400" dirty="0">
                 <a:solidFill>
@@ -4232,6 +4380,20 @@
             </a:r>
           </a:p>
           <a:p>
+            <a:pPr algn="l"/>
+            <a:r>
+              <a:rPr lang="en-US" sz="3600" dirty="0">
+                <a:solidFill>
+                  <a:srgbClr val="FFFF00"/>
+                </a:solidFill>
+                <a:latin typeface="Avenir Medium" panose="02000503020000020003" pitchFamily="2" charset="0"/>
+                <a:ea typeface="Bodoni Ornaments" pitchFamily="2" charset="0"/>
+              </a:rPr>
+              <a:t>       C                  G              C</a:t>
+            </a:r>
+          </a:p>
+          <a:p>
+            <a:pPr algn="l"/>
             <a:r>
               <a:rPr lang="en-US" sz="4400" dirty="0">
                 <a:solidFill>
@@ -4248,7 +4410,7 @@
     </p:spTree>
     <p:extLst>
       <p:ext uri="{BB962C8B-B14F-4D97-AF65-F5344CB8AC3E}">
-        <p14:creationId xmlns:p14="http://schemas.microsoft.com/office/powerpoint/2010/main" val="3482481361"/>
+        <p14:creationId xmlns:p14="http://schemas.microsoft.com/office/powerpoint/2010/main" val="2095619529"/>
       </p:ext>
     </p:extLst>
   </p:cSld>
@@ -4317,7 +4479,54 @@
           </a:bodyPr>
           <a:lstStyle/>
           <a:p>
-            <a:endParaRPr lang="en-US" sz="4400" dirty="0">
+            <a:pPr algn="l"/>
+            <a:r>
+              <a:rPr lang="en-US" sz="3600" dirty="0">
+                <a:solidFill>
+                  <a:srgbClr val="FFFF00"/>
+                </a:solidFill>
+                <a:latin typeface="Avenir Medium" panose="02000503020000020003" pitchFamily="2" charset="0"/>
+                <a:ea typeface="Bodoni Ornaments" pitchFamily="2" charset="0"/>
+              </a:rPr>
+              <a:t>         C</a:t>
+            </a:r>
+          </a:p>
+          <a:p>
+            <a:pPr algn="l"/>
+            <a:r>
+              <a:rPr lang="en-US" sz="4400" dirty="0">
+                <a:solidFill>
+                  <a:schemeClr val="bg1"/>
+                </a:solidFill>
+                <a:latin typeface="Avenir Medium" panose="02000503020000020003" pitchFamily="2" charset="0"/>
+                <a:ea typeface="Bodoni Ornaments" pitchFamily="2" charset="0"/>
+              </a:rPr>
+              <a:t>And when, before the throne</a:t>
+            </a:r>
+          </a:p>
+          <a:p>
+            <a:pPr algn="l"/>
+            <a:r>
+              <a:rPr lang="en-US" sz="3600" dirty="0">
+                <a:solidFill>
+                  <a:schemeClr val="bg1"/>
+                </a:solidFill>
+                <a:latin typeface="Avenir Medium" panose="02000503020000020003" pitchFamily="2" charset="0"/>
+                <a:ea typeface="Bodoni Ornaments" pitchFamily="2" charset="0"/>
+              </a:rPr>
+              <a:t>   </a:t>
+            </a:r>
+            <a:r>
+              <a:rPr lang="en-US" sz="3600" dirty="0">
+                <a:solidFill>
+                  <a:srgbClr val="FFFF00"/>
+                </a:solidFill>
+                <a:latin typeface="Avenir Medium" panose="02000503020000020003" pitchFamily="2" charset="0"/>
+                <a:ea typeface="Bodoni Ornaments" pitchFamily="2" charset="0"/>
+              </a:rPr>
+              <a:t>G                       C</a:t>
+            </a:r>
+            <a:endParaRPr lang="en-US" sz="3600" dirty="0">
               <a:solidFill>
                 <a:schemeClr val="bg1"/>
               </a:solidFill>
@@ -4326,51 +4535,66 @@
             </a:endParaRPr>
           </a:p>
           <a:p>
-            <a:endParaRPr lang="en-US" sz="4400" dirty="0">
+            <a:pPr algn="l"/>
+            <a:r>
+              <a:rPr lang="en-US" sz="4400" dirty="0">
+                <a:solidFill>
+                  <a:schemeClr val="bg1"/>
+                </a:solidFill>
+                <a:latin typeface="Avenir Medium" panose="02000503020000020003" pitchFamily="2" charset="0"/>
+                <a:ea typeface="Bodoni Ornaments" pitchFamily="2" charset="0"/>
+              </a:rPr>
+              <a:t>I stand in Him complete</a:t>
+            </a:r>
+          </a:p>
+          <a:p>
+            <a:pPr algn="l"/>
+            <a:r>
+              <a:rPr lang="en-US" sz="3600" dirty="0">
+                <a:solidFill>
+                  <a:srgbClr val="FFFF00"/>
+                </a:solidFill>
+                <a:latin typeface="Avenir Medium" panose="02000503020000020003" pitchFamily="2" charset="0"/>
+                <a:ea typeface="Bodoni Ornaments" pitchFamily="2" charset="0"/>
+              </a:rPr>
+              <a:t>            Am                          F</a:t>
+            </a:r>
+          </a:p>
+          <a:p>
+            <a:pPr algn="l"/>
+            <a:r>
+              <a:rPr lang="en-US" sz="4400" dirty="0">
+                <a:solidFill>
+                  <a:schemeClr val="bg1"/>
+                </a:solidFill>
+                <a:latin typeface="Avenir Medium" panose="02000503020000020003" pitchFamily="2" charset="0"/>
+                <a:ea typeface="Bodoni Ornaments" pitchFamily="2" charset="0"/>
+              </a:rPr>
+              <a:t>Jesus died my soul to save</a:t>
+            </a:r>
+          </a:p>
+          <a:p>
+            <a:pPr algn="l"/>
+            <a:r>
+              <a:rPr lang="en-US" sz="3600">
+                <a:solidFill>
+                  <a:srgbClr val="FFFF00"/>
+                </a:solidFill>
+                <a:latin typeface="Avenir Medium" panose="02000503020000020003" pitchFamily="2" charset="0"/>
+                <a:ea typeface="Bodoni Ornaments" pitchFamily="2" charset="0"/>
+              </a:rPr>
+              <a:t>       C               G      C</a:t>
+            </a:r>
+            <a:endParaRPr lang="en-US" sz="3600" dirty="0">
               <a:solidFill>
-                <a:schemeClr val="bg1"/>
+                <a:srgbClr val="FFFF00"/>
               </a:solidFill>
               <a:latin typeface="Avenir Medium" panose="02000503020000020003" pitchFamily="2" charset="0"/>
               <a:ea typeface="Bodoni Ornaments" pitchFamily="2" charset="0"/>
             </a:endParaRPr>
           </a:p>
           <a:p>
-            <a:r>
-              <a:rPr lang="en-US" sz="4400" dirty="0">
-                <a:solidFill>
-                  <a:schemeClr val="bg1"/>
-                </a:solidFill>
-                <a:latin typeface="Avenir Medium" panose="02000503020000020003" pitchFamily="2" charset="0"/>
-                <a:ea typeface="Bodoni Ornaments" pitchFamily="2" charset="0"/>
-              </a:rPr>
-              <a:t>And when, before the throne</a:t>
-            </a:r>
-          </a:p>
-          <a:p>
-            <a:r>
-              <a:rPr lang="en-US" sz="4400" dirty="0">
-                <a:solidFill>
-                  <a:schemeClr val="bg1"/>
-                </a:solidFill>
-                <a:latin typeface="Avenir Medium" panose="02000503020000020003" pitchFamily="2" charset="0"/>
-                <a:ea typeface="Bodoni Ornaments" pitchFamily="2" charset="0"/>
-              </a:rPr>
-              <a:t>I stand in Him complete</a:t>
-            </a:r>
-          </a:p>
-          <a:p>
-            <a:r>
-              <a:rPr lang="en-US" sz="4400" dirty="0">
-                <a:solidFill>
-                  <a:schemeClr val="bg1"/>
-                </a:solidFill>
-                <a:latin typeface="Avenir Medium" panose="02000503020000020003" pitchFamily="2" charset="0"/>
-                <a:ea typeface="Bodoni Ornaments" pitchFamily="2" charset="0"/>
-              </a:rPr>
-              <a:t>Jesus died my soul to save</a:t>
-            </a:r>
-          </a:p>
-          <a:p>
+            <a:pPr algn="l"/>
             <a:r>
               <a:rPr lang="en-US" sz="4400" dirty="0">
                 <a:solidFill>
@@ -4415,7 +4639,7 @@
         <p:cNvPr id="1" name="">
           <a:extLst>
             <a:ext uri="{FF2B5EF4-FFF2-40B4-BE49-F238E27FC236}">
-              <a16:creationId xmlns:a16="http://schemas.microsoft.com/office/drawing/2014/main" id="{DA9A350A-3CA0-994A-3FE1-62AF4A036FEA}"/>
+              <a16:creationId xmlns:a16="http://schemas.microsoft.com/office/drawing/2014/main" id="{41471E6E-6905-72B8-04FB-3A90EC4F8961}"/>
             </a:ext>
           </a:extLst>
         </p:cNvPr>
@@ -4435,7 +4659,7 @@
           <p:cNvPr id="3" name="Subtitle 2">
             <a:extLst>
               <a:ext uri="{FF2B5EF4-FFF2-40B4-BE49-F238E27FC236}">
-                <a16:creationId xmlns:a16="http://schemas.microsoft.com/office/drawing/2014/main" id="{EF7E5E34-9AE7-53ED-43EA-48359B725023}"/>
+                <a16:creationId xmlns:a16="http://schemas.microsoft.com/office/drawing/2014/main" id="{F5EE3A6B-AAC4-EDD6-7960-6E110807F631}"/>
               </a:ext>
             </a:extLst>
           </p:cNvPr>
@@ -4458,24 +4682,20 @@
           </a:bodyPr>
           <a:lstStyle/>
           <a:p>
-            <a:endParaRPr lang="en-US" sz="4400" dirty="0">
-              <a:solidFill>
-                <a:schemeClr val="bg1"/>
-              </a:solidFill>
-              <a:latin typeface="Avenir Medium" panose="02000503020000020003" pitchFamily="2" charset="0"/>
-              <a:ea typeface="Bodoni Ornaments" pitchFamily="2" charset="0"/>
-            </a:endParaRPr>
-          </a:p>
-          <a:p>
-            <a:endParaRPr lang="en-US" sz="4400" dirty="0">
-              <a:solidFill>
-                <a:schemeClr val="bg1"/>
-              </a:solidFill>
-              <a:latin typeface="Avenir Medium" panose="02000503020000020003" pitchFamily="2" charset="0"/>
-              <a:ea typeface="Bodoni Ornaments" pitchFamily="2" charset="0"/>
-            </a:endParaRPr>
-          </a:p>
-          <a:p>
+            <a:pPr algn="l"/>
+            <a:r>
+              <a:rPr lang="en-US" sz="3600" dirty="0">
+                <a:solidFill>
+                  <a:srgbClr val="FFFF00"/>
+                </a:solidFill>
+                <a:latin typeface="Avenir Medium" panose="02000503020000020003" pitchFamily="2" charset="0"/>
+                <a:ea typeface="Bodoni Ornaments" pitchFamily="2" charset="0"/>
+              </a:rPr>
+              <a:t>C                        Am</a:t>
+            </a:r>
+          </a:p>
+          <a:p>
+            <a:pPr algn="l"/>
             <a:r>
               <a:rPr lang="en-US" sz="4400" dirty="0">
                 <a:solidFill>
@@ -4488,6 +4708,20 @@
             </a:r>
           </a:p>
           <a:p>
+            <a:pPr algn="l"/>
+            <a:r>
+              <a:rPr lang="en-US" sz="3600" dirty="0">
+                <a:solidFill>
+                  <a:srgbClr val="FFFF00"/>
+                </a:solidFill>
+                <a:latin typeface="Avenir Medium" panose="02000503020000020003" pitchFamily="2" charset="0"/>
+                <a:ea typeface="Bodoni Ornaments" pitchFamily="2" charset="0"/>
+              </a:rPr>
+              <a:t>C                     G</a:t>
+            </a:r>
+          </a:p>
+          <a:p>
+            <a:pPr algn="l"/>
             <a:r>
               <a:rPr lang="en-US" sz="4400" dirty="0">
                 <a:solidFill>
@@ -4500,6 +4734,20 @@
             </a:r>
           </a:p>
           <a:p>
+            <a:pPr algn="l"/>
+            <a:r>
+              <a:rPr lang="en-US" sz="3600" dirty="0">
+                <a:solidFill>
+                  <a:srgbClr val="FFFF00"/>
+                </a:solidFill>
+                <a:latin typeface="Avenir Medium" panose="02000503020000020003" pitchFamily="2" charset="0"/>
+                <a:ea typeface="Bodoni Ornaments" pitchFamily="2" charset="0"/>
+              </a:rPr>
+              <a:t>C                         F</a:t>
+            </a:r>
+          </a:p>
+          <a:p>
+            <a:pPr algn="l"/>
             <a:r>
               <a:rPr lang="en-US" sz="4400" dirty="0">
                 <a:solidFill>
@@ -4512,6 +4760,20 @@
             </a:r>
           </a:p>
           <a:p>
+            <a:pPr algn="l"/>
+            <a:r>
+              <a:rPr lang="en-US" sz="3600" dirty="0">
+                <a:solidFill>
+                  <a:srgbClr val="FFFF00"/>
+                </a:solidFill>
+                <a:latin typeface="Avenir Medium" panose="02000503020000020003" pitchFamily="2" charset="0"/>
+                <a:ea typeface="Bodoni Ornaments" pitchFamily="2" charset="0"/>
+              </a:rPr>
+              <a:t>       C                  G              C</a:t>
+            </a:r>
+          </a:p>
+          <a:p>
+            <a:pPr algn="l"/>
             <a:r>
               <a:rPr lang="en-US" sz="4400" dirty="0">
                 <a:solidFill>
@@ -4528,7 +4790,7 @@
     </p:spTree>
     <p:extLst>
       <p:ext uri="{BB962C8B-B14F-4D97-AF65-F5344CB8AC3E}">
-        <p14:creationId xmlns:p14="http://schemas.microsoft.com/office/powerpoint/2010/main" val="350274450"/>
+        <p14:creationId xmlns:p14="http://schemas.microsoft.com/office/powerpoint/2010/main" val="1348548823"/>
       </p:ext>
     </p:extLst>
   </p:cSld>

--- a/Jesus Paid It All_chords.pptx
+++ b/Jesus Paid It All_chords.pptx
@@ -266,7 +266,7 @@
           <a:p>
             <a:fld id="{E759A0DE-F190-5444-87AC-4719D5F20D15}" type="datetimeFigureOut">
               <a:rPr lang="en-US" smtClean="0"/>
-              <a:t>4/3/26</a:t>
+              <a:t>5/31/26</a:t>
             </a:fld>
             <a:endParaRPr lang="en-US"/>
           </a:p>
@@ -464,7 +464,7 @@
           <a:p>
             <a:fld id="{E759A0DE-F190-5444-87AC-4719D5F20D15}" type="datetimeFigureOut">
               <a:rPr lang="en-US" smtClean="0"/>
-              <a:t>4/3/26</a:t>
+              <a:t>5/31/26</a:t>
             </a:fld>
             <a:endParaRPr lang="en-US"/>
           </a:p>
@@ -672,7 +672,7 @@
           <a:p>
             <a:fld id="{E759A0DE-F190-5444-87AC-4719D5F20D15}" type="datetimeFigureOut">
               <a:rPr lang="en-US" smtClean="0"/>
-              <a:t>4/3/26</a:t>
+              <a:t>5/31/26</a:t>
             </a:fld>
             <a:endParaRPr lang="en-US"/>
           </a:p>
@@ -870,7 +870,7 @@
           <a:p>
             <a:fld id="{E759A0DE-F190-5444-87AC-4719D5F20D15}" type="datetimeFigureOut">
               <a:rPr lang="en-US" smtClean="0"/>
-              <a:t>4/3/26</a:t>
+              <a:t>5/31/26</a:t>
             </a:fld>
             <a:endParaRPr lang="en-US"/>
           </a:p>
@@ -1145,7 +1145,7 @@
           <a:p>
             <a:fld id="{E759A0DE-F190-5444-87AC-4719D5F20D15}" type="datetimeFigureOut">
               <a:rPr lang="en-US" smtClean="0"/>
-              <a:t>4/3/26</a:t>
+              <a:t>5/31/26</a:t>
             </a:fld>
             <a:endParaRPr lang="en-US"/>
           </a:p>
@@ -1410,7 +1410,7 @@
           <a:p>
             <a:fld id="{E759A0DE-F190-5444-87AC-4719D5F20D15}" type="datetimeFigureOut">
               <a:rPr lang="en-US" smtClean="0"/>
-              <a:t>4/3/26</a:t>
+              <a:t>5/31/26</a:t>
             </a:fld>
             <a:endParaRPr lang="en-US"/>
           </a:p>
@@ -1822,7 +1822,7 @@
           <a:p>
             <a:fld id="{E759A0DE-F190-5444-87AC-4719D5F20D15}" type="datetimeFigureOut">
               <a:rPr lang="en-US" smtClean="0"/>
-              <a:t>4/3/26</a:t>
+              <a:t>5/31/26</a:t>
             </a:fld>
             <a:endParaRPr lang="en-US"/>
           </a:p>
@@ -1963,7 +1963,7 @@
           <a:p>
             <a:fld id="{E759A0DE-F190-5444-87AC-4719D5F20D15}" type="datetimeFigureOut">
               <a:rPr lang="en-US" smtClean="0"/>
-              <a:t>4/3/26</a:t>
+              <a:t>5/31/26</a:t>
             </a:fld>
             <a:endParaRPr lang="en-US"/>
           </a:p>
@@ -2076,7 +2076,7 @@
           <a:p>
             <a:fld id="{E759A0DE-F190-5444-87AC-4719D5F20D15}" type="datetimeFigureOut">
               <a:rPr lang="en-US" smtClean="0"/>
-              <a:t>4/3/26</a:t>
+              <a:t>5/31/26</a:t>
             </a:fld>
             <a:endParaRPr lang="en-US"/>
           </a:p>
@@ -2387,7 +2387,7 @@
           <a:p>
             <a:fld id="{E759A0DE-F190-5444-87AC-4719D5F20D15}" type="datetimeFigureOut">
               <a:rPr lang="en-US" smtClean="0"/>
-              <a:t>4/3/26</a:t>
+              <a:t>5/31/26</a:t>
             </a:fld>
             <a:endParaRPr lang="en-US"/>
           </a:p>
@@ -2675,7 +2675,7 @@
           <a:p>
             <a:fld id="{E759A0DE-F190-5444-87AC-4719D5F20D15}" type="datetimeFigureOut">
               <a:rPr lang="en-US" smtClean="0"/>
-              <a:t>4/3/26</a:t>
+              <a:t>5/31/26</a:t>
             </a:fld>
             <a:endParaRPr lang="en-US"/>
           </a:p>
@@ -2916,7 +2916,7 @@
           <a:p>
             <a:fld id="{E759A0DE-F190-5444-87AC-4719D5F20D15}" type="datetimeFigureOut">
               <a:rPr lang="en-US" smtClean="0"/>
-              <a:t>4/3/26</a:t>
+              <a:t>5/31/26</a:t>
             </a:fld>
             <a:endParaRPr lang="en-US"/>
           </a:p>
@@ -4859,7 +4859,127 @@
           </a:bodyPr>
           <a:lstStyle/>
           <a:p>
-            <a:endParaRPr lang="en-US" sz="4400" dirty="0">
+            <a:pPr algn="l"/>
+            <a:r>
+              <a:rPr lang="en-US" sz="3200">
+                <a:solidFill>
+                  <a:schemeClr val="bg1"/>
+                </a:solidFill>
+                <a:latin typeface="Avenir Medium" panose="02000503020000020003" pitchFamily="2" charset="0"/>
+                <a:ea typeface="Bodoni Ornaments" pitchFamily="2" charset="0"/>
+              </a:rPr>
+              <a:t>    </a:t>
+            </a:r>
+            <a:r>
+              <a:rPr lang="en-US" sz="3200" dirty="0">
+                <a:solidFill>
+                  <a:schemeClr val="bg1"/>
+                </a:solidFill>
+                <a:latin typeface="Avenir Medium" panose="02000503020000020003" pitchFamily="2" charset="0"/>
+                <a:ea typeface="Bodoni Ornaments" pitchFamily="2" charset="0"/>
+              </a:rPr>
+              <a:t> </a:t>
+            </a:r>
+            <a:r>
+              <a:rPr lang="en-US" sz="3200">
+                <a:solidFill>
+                  <a:srgbClr val="FFFF00"/>
+                </a:solidFill>
+                <a:latin typeface="Avenir Medium" panose="02000503020000020003" pitchFamily="2" charset="0"/>
+                <a:ea typeface="Bodoni Ornaments" pitchFamily="2" charset="0"/>
+              </a:rPr>
+              <a:t> </a:t>
+            </a:r>
+            <a:r>
+              <a:rPr lang="en-US" sz="3200" dirty="0">
+                <a:solidFill>
+                  <a:srgbClr val="FFFF00"/>
+                </a:solidFill>
+                <a:latin typeface="Avenir Medium" panose="02000503020000020003" pitchFamily="2" charset="0"/>
+                <a:ea typeface="Bodoni Ornaments" pitchFamily="2" charset="0"/>
+              </a:rPr>
+              <a:t>C                              </a:t>
+            </a:r>
+            <a:r>
+              <a:rPr lang="en-US" sz="3200" dirty="0" err="1">
+                <a:solidFill>
+                  <a:srgbClr val="FFFF00"/>
+                </a:solidFill>
+                <a:latin typeface="Avenir Medium" panose="02000503020000020003" pitchFamily="2" charset="0"/>
+                <a:ea typeface="Bodoni Ornaments" pitchFamily="2" charset="0"/>
+              </a:rPr>
+              <a:t>Csus</a:t>
+            </a:r>
+            <a:r>
+              <a:rPr lang="en-US" sz="3200" dirty="0">
+                <a:solidFill>
+                  <a:srgbClr val="FFFF00"/>
+                </a:solidFill>
+                <a:latin typeface="Avenir Medium" panose="02000503020000020003" pitchFamily="2" charset="0"/>
+                <a:ea typeface="Bodoni Ornaments" pitchFamily="2" charset="0"/>
+              </a:rPr>
+              <a:t>         </a:t>
+            </a:r>
+          </a:p>
+          <a:p>
+            <a:pPr algn="l"/>
+            <a:r>
+              <a:rPr lang="en-US" sz="3200" dirty="0">
+                <a:solidFill>
+                  <a:schemeClr val="bg1"/>
+                </a:solidFill>
+                <a:latin typeface="Avenir Medium" panose="02000503020000020003" pitchFamily="2" charset="0"/>
+                <a:ea typeface="Bodoni Ornaments" pitchFamily="2" charset="0"/>
+              </a:rPr>
+              <a:t>Oh praise the one who paid my debt</a:t>
+            </a:r>
+          </a:p>
+          <a:p>
+            <a:pPr algn="l"/>
+            <a:r>
+              <a:rPr lang="en-US" sz="3200" dirty="0">
+                <a:solidFill>
+                  <a:srgbClr val="FFFF00"/>
+                </a:solidFill>
+                <a:latin typeface="Avenir Medium" panose="02000503020000020003" pitchFamily="2" charset="0"/>
+                <a:ea typeface="Bodoni Ornaments" pitchFamily="2" charset="0"/>
+              </a:rPr>
+              <a:t>       C                          </a:t>
+            </a:r>
+            <a:r>
+              <a:rPr lang="en-US" sz="3200" dirty="0" err="1">
+                <a:solidFill>
+                  <a:srgbClr val="FFFF00"/>
+                </a:solidFill>
+                <a:latin typeface="Avenir Medium" panose="02000503020000020003" pitchFamily="2" charset="0"/>
+                <a:ea typeface="Bodoni Ornaments" pitchFamily="2" charset="0"/>
+              </a:rPr>
+              <a:t>Csus</a:t>
+            </a:r>
+            <a:endParaRPr lang="en-US" sz="3200" dirty="0">
+              <a:solidFill>
+                <a:srgbClr val="FFFF00"/>
+              </a:solidFill>
+              <a:latin typeface="Avenir Medium" panose="02000503020000020003" pitchFamily="2" charset="0"/>
+              <a:ea typeface="Bodoni Ornaments" pitchFamily="2" charset="0"/>
+            </a:endParaRPr>
+          </a:p>
+          <a:p>
+            <a:pPr algn="l"/>
+            <a:r>
+              <a:rPr lang="en-US" sz="3200" dirty="0">
+                <a:solidFill>
+                  <a:schemeClr val="bg1"/>
+                </a:solidFill>
+                <a:latin typeface="Avenir Medium" panose="02000503020000020003" pitchFamily="2" charset="0"/>
+                <a:ea typeface="Bodoni Ornaments" pitchFamily="2" charset="0"/>
+              </a:rPr>
+              <a:t>And raised this life up from the dead</a:t>
+            </a:r>
+          </a:p>
+          <a:p>
+            <a:pPr algn="l"/>
+            <a:endParaRPr lang="en-US" sz="3200" dirty="0">
               <a:solidFill>
                 <a:schemeClr val="bg1"/>
               </a:solidFill>
@@ -4868,17 +4988,22 @@
             </a:endParaRPr>
           </a:p>
           <a:p>
-            <a:endParaRPr lang="en-US" sz="4400" dirty="0">
-              <a:solidFill>
-                <a:schemeClr val="bg1"/>
-              </a:solidFill>
-              <a:latin typeface="Avenir Medium" panose="02000503020000020003" pitchFamily="2" charset="0"/>
-              <a:ea typeface="Bodoni Ornaments" pitchFamily="2" charset="0"/>
-            </a:endParaRPr>
-          </a:p>
-          <a:p>
-            <a:r>
-              <a:rPr lang="en-US" sz="4400" dirty="0">
+            <a:pPr algn="l"/>
+            <a:r>
+              <a:rPr lang="en-US" sz="3200" dirty="0">
+                <a:solidFill>
+                  <a:srgbClr val="FFFF00"/>
+                </a:solidFill>
+                <a:latin typeface="Avenir Medium" panose="02000503020000020003" pitchFamily="2" charset="0"/>
+                <a:ea typeface="Bodoni Ornaments" pitchFamily="2" charset="0"/>
+              </a:rPr>
+              <a:t>      C                              F         </a:t>
+            </a:r>
+          </a:p>
+          <a:p>
+            <a:pPr algn="l"/>
+            <a:r>
+              <a:rPr lang="en-US" sz="3200" dirty="0">
                 <a:solidFill>
                   <a:schemeClr val="bg1"/>
                 </a:solidFill>
@@ -4889,27 +5014,34 @@
             </a:r>
           </a:p>
           <a:p>
-            <a:r>
-              <a:rPr lang="en-US" sz="4400" dirty="0">
+            <a:pPr algn="l"/>
+            <a:r>
+              <a:rPr lang="en-US" sz="3200" dirty="0">
+                <a:solidFill>
+                  <a:srgbClr val="FFFF00"/>
+                </a:solidFill>
+                <a:latin typeface="Avenir Medium" panose="02000503020000020003" pitchFamily="2" charset="0"/>
+                <a:ea typeface="Bodoni Ornaments" pitchFamily="2" charset="0"/>
+              </a:rPr>
+              <a:t>       Dm                          F</a:t>
+            </a:r>
+          </a:p>
+          <a:p>
+            <a:pPr algn="l"/>
+            <a:r>
+              <a:rPr lang="en-US" sz="3200" dirty="0">
                 <a:solidFill>
                   <a:schemeClr val="bg1"/>
                 </a:solidFill>
                 <a:latin typeface="Avenir Medium" panose="02000503020000020003" pitchFamily="2" charset="0"/>
                 <a:ea typeface="Bodoni Ornaments" pitchFamily="2" charset="0"/>
               </a:rPr>
-              <a:t>And raised this life up from </a:t>
-            </a:r>
-            <a:r>
-              <a:rPr lang="en-US" sz="4400">
-                <a:solidFill>
-                  <a:schemeClr val="bg1"/>
-                </a:solidFill>
-                <a:latin typeface="Avenir Medium" panose="02000503020000020003" pitchFamily="2" charset="0"/>
-                <a:ea typeface="Bodoni Ornaments" pitchFamily="2" charset="0"/>
-              </a:rPr>
-              <a:t>the dead</a:t>
-            </a:r>
-            <a:endParaRPr lang="en-US" sz="4400" dirty="0">
+              <a:t>And raised this life up from the dead</a:t>
+            </a:r>
+          </a:p>
+          <a:p>
+            <a:pPr algn="l"/>
+            <a:endParaRPr lang="en-US" sz="3200" dirty="0">
               <a:solidFill>
                 <a:schemeClr val="bg1"/>
               </a:solidFill>
